--- a/docs/SRM-LabReserve.pptx
+++ b/docs/SRM-LabReserve.pptx
@@ -507,7 +507,7 @@
           <a:lstStyle/>
           <a:p>
             <a:r>
-              <a:t>Open with the one-line pitch: SRM LabReserve lets students and researchers request lab rooms and instruments, and lets lab coordinators approve them, with every decision recorded. The campus inventory has 22 rooms. The 37 passing tests are on the last slides.</a:t>
+              <a:t>Open with the one-line pitch: SRM LabReserve lets students and researchers request lab rooms and instruments, and lets lab coordinators approve them, with every decision recorded. The campus inventory has 22 rooms. The 48 passing tests are on the last slides.</a:t>
             </a:r>
           </a:p>
         </p:txBody>
@@ -647,7 +647,7 @@
           <a:lstStyle/>
           <a:p>
             <a:r>
-              <a:t>Walk through the six areas. Save My Practical is the distinctive one: a teacher enters the activity, class size and time, and gets ranked alternatives with reasons. Its lab capacities are illustrative demo data, not verified SRM specifications. Student counts are requested headcounts, not attendance.</a:t>
+              <a:t>Walk through the six areas. In CS, AR/VR and Mac labs an individual student books one numbered system on a ticket-style map, while a group booking still takes the whole lab. Save My Practical is the distinctive one: a teacher enters the activity, class size and time, and gets ranked alternatives with reasons. Its lab capacities are illustrative demo data, not verified SRM specifications. Student counts are requested headcounts, not attendance.</a:t>
             </a:r>
           </a:p>
         </p:txBody>
@@ -787,7 +787,7 @@
           <a:lstStyle/>
           <a:p>
             <a:r>
-              <a:t>Security is enforced on the server: hiding a button is not the protection. The 37 tests use real HTTP requests, separate student and coordinator logins, and a temporary SQLite database. One test injects conflicting legacy data on purpose to prove approval rechecks conflicts.</a:t>
+              <a:t>Security is enforced on the server: hiding a button is not the protection. The 48 tests use real HTTP requests, separate student and coordinator logins, and a temporary SQLite database. One test injects conflicting legacy data on purpose to prove approval rechecks conflicts.</a:t>
             </a:r>
           </a:p>
         </p:txBody>
@@ -4284,7 +4284,7 @@
                 </a:solidFill>
                 <a:latin typeface="Cambria"/>
               </a:rPr>
-              <a:t>37</a:t>
+              <a:t>48</a:t>
             </a:r>
           </a:p>
         </p:txBody>
@@ -5102,7 +5102,7 @@
                 </a:solidFill>
                 <a:latin typeface="Cambria"/>
               </a:rPr>
-              <a:t>Rooms and equipment</a:t>
+              <a:t>Rooms and systems</a:t>
             </a:r>
           </a:p>
           <a:p>
@@ -5114,7 +5114,7 @@
                 </a:solidFill>
                 <a:latin typeface="Calibri"/>
               </a:rPr>
-              <a:t>22 campus labs plus demo instruments, with a required reason</a:t>
+              <a:t>Whole labs, or one numbered system in a 70-system lab</a:t>
             </a:r>
           </a:p>
         </p:txBody>
@@ -5212,7 +5212,7 @@
                 </a:solidFill>
                 <a:latin typeface="Calibri"/>
               </a:rPr>
-              <a:t>Pick a time and see rooms with no overlapping booking</a:t>
+              <a:t>Pick a time and see free rooms and free systems</a:t>
             </a:r>
           </a:p>
         </p:txBody>
@@ -7325,7 +7325,7 @@
                 </a:solidFill>
                 <a:latin typeface="Cambria"/>
               </a:rPr>
-              <a:t>37</a:t>
+              <a:t>48</a:t>
             </a:r>
           </a:p>
         </p:txBody>
@@ -7403,7 +7403,7 @@
                 </a:solidFill>
                 <a:latin typeface="Calibri"/>
               </a:rPr>
-              <a:t>Overlaps, adjacency, simultaneous requests</a:t>
+              <a:t>Room and per-system overlaps, adjacency</a:t>
             </a:r>
           </a:p>
           <a:p>
